--- a/ゲーム科3年/00_前期/オンラインゲームプログラミングⅡ/03_接続と同期.pptx
+++ b/ゲーム科3年/00_前期/オンラインゲームプログラミングⅡ/03_接続と同期.pptx
@@ -278,7 +278,7 @@
           <a:p>
             <a:fld id="{E9CC885B-4903-4D54-9A93-00025F12DED9}" type="datetimeFigureOut">
               <a:rPr kumimoji="1" lang="ja-JP" altLang="en-US" smtClean="0"/>
-              <a:t>2025/1/21</a:t>
+              <a:t>2025/7/8</a:t>
             </a:fld>
             <a:endParaRPr kumimoji="1" lang="ja-JP" altLang="en-US"/>
           </a:p>
@@ -508,7 +508,7 @@
           <a:p>
             <a:fld id="{E9CC885B-4903-4D54-9A93-00025F12DED9}" type="datetimeFigureOut">
               <a:rPr kumimoji="1" lang="ja-JP" altLang="en-US" smtClean="0"/>
-              <a:t>2025/1/21</a:t>
+              <a:t>2025/7/8</a:t>
             </a:fld>
             <a:endParaRPr kumimoji="1" lang="ja-JP" altLang="en-US"/>
           </a:p>
@@ -748,7 +748,7 @@
           <a:p>
             <a:fld id="{E9CC885B-4903-4D54-9A93-00025F12DED9}" type="datetimeFigureOut">
               <a:rPr kumimoji="1" lang="ja-JP" altLang="en-US" smtClean="0"/>
-              <a:t>2025/1/21</a:t>
+              <a:t>2025/7/8</a:t>
             </a:fld>
             <a:endParaRPr kumimoji="1" lang="ja-JP" altLang="en-US"/>
           </a:p>
@@ -978,7 +978,7 @@
           <a:p>
             <a:fld id="{E9CC885B-4903-4D54-9A93-00025F12DED9}" type="datetimeFigureOut">
               <a:rPr kumimoji="1" lang="ja-JP" altLang="en-US" smtClean="0"/>
-              <a:t>2025/1/21</a:t>
+              <a:t>2025/7/8</a:t>
             </a:fld>
             <a:endParaRPr kumimoji="1" lang="ja-JP" altLang="en-US"/>
           </a:p>
@@ -1253,7 +1253,7 @@
           <a:p>
             <a:fld id="{E9CC885B-4903-4D54-9A93-00025F12DED9}" type="datetimeFigureOut">
               <a:rPr kumimoji="1" lang="ja-JP" altLang="en-US" smtClean="0"/>
-              <a:t>2025/1/21</a:t>
+              <a:t>2025/7/8</a:t>
             </a:fld>
             <a:endParaRPr kumimoji="1" lang="ja-JP" altLang="en-US"/>
           </a:p>
@@ -1582,7 +1582,7 @@
           <a:p>
             <a:fld id="{E9CC885B-4903-4D54-9A93-00025F12DED9}" type="datetimeFigureOut">
               <a:rPr kumimoji="1" lang="ja-JP" altLang="en-US" smtClean="0"/>
-              <a:t>2025/1/21</a:t>
+              <a:t>2025/7/8</a:t>
             </a:fld>
             <a:endParaRPr kumimoji="1" lang="ja-JP" altLang="en-US"/>
           </a:p>
@@ -2058,7 +2058,7 @@
           <a:p>
             <a:fld id="{E9CC885B-4903-4D54-9A93-00025F12DED9}" type="datetimeFigureOut">
               <a:rPr kumimoji="1" lang="ja-JP" altLang="en-US" smtClean="0"/>
-              <a:t>2025/1/21</a:t>
+              <a:t>2025/7/8</a:t>
             </a:fld>
             <a:endParaRPr kumimoji="1" lang="ja-JP" altLang="en-US"/>
           </a:p>
@@ -2199,7 +2199,7 @@
           <a:p>
             <a:fld id="{E9CC885B-4903-4D54-9A93-00025F12DED9}" type="datetimeFigureOut">
               <a:rPr kumimoji="1" lang="ja-JP" altLang="en-US" smtClean="0"/>
-              <a:t>2025/1/21</a:t>
+              <a:t>2025/7/8</a:t>
             </a:fld>
             <a:endParaRPr kumimoji="1" lang="ja-JP" altLang="en-US"/>
           </a:p>
@@ -2312,7 +2312,7 @@
           <a:p>
             <a:fld id="{E9CC885B-4903-4D54-9A93-00025F12DED9}" type="datetimeFigureOut">
               <a:rPr kumimoji="1" lang="ja-JP" altLang="en-US" smtClean="0"/>
-              <a:t>2025/1/21</a:t>
+              <a:t>2025/7/8</a:t>
             </a:fld>
             <a:endParaRPr kumimoji="1" lang="ja-JP" altLang="en-US"/>
           </a:p>
@@ -2655,7 +2655,7 @@
           <a:p>
             <a:fld id="{E9CC885B-4903-4D54-9A93-00025F12DED9}" type="datetimeFigureOut">
               <a:rPr kumimoji="1" lang="ja-JP" altLang="en-US" smtClean="0"/>
-              <a:t>2025/1/21</a:t>
+              <a:t>2025/7/8</a:t>
             </a:fld>
             <a:endParaRPr kumimoji="1" lang="ja-JP" altLang="en-US"/>
           </a:p>
@@ -2943,7 +2943,7 @@
           <a:p>
             <a:fld id="{E9CC885B-4903-4D54-9A93-00025F12DED9}" type="datetimeFigureOut">
               <a:rPr kumimoji="1" lang="ja-JP" altLang="en-US" smtClean="0"/>
-              <a:t>2025/1/21</a:t>
+              <a:t>2025/7/8</a:t>
             </a:fld>
             <a:endParaRPr kumimoji="1" lang="ja-JP" altLang="en-US"/>
           </a:p>
@@ -3216,7 +3216,7 @@
           <a:p>
             <a:fld id="{E9CC885B-4903-4D54-9A93-00025F12DED9}" type="datetimeFigureOut">
               <a:rPr kumimoji="1" lang="ja-JP" altLang="en-US" smtClean="0"/>
-              <a:t>2025/1/21</a:t>
+              <a:t>2025/7/8</a:t>
             </a:fld>
             <a:endParaRPr kumimoji="1" lang="ja-JP" altLang="en-US"/>
           </a:p>
@@ -5876,7 +5876,7 @@
         <p:spPr>
           <a:xfrm>
             <a:off x="567542" y="4573283"/>
-            <a:ext cx="8701421" cy="461665"/>
+            <a:ext cx="9316974" cy="461665"/>
           </a:xfrm>
           <a:prstGeom prst="rect">
             <a:avLst/>
@@ -5907,7 +5907,7 @@
             </a:r>
             <a:r>
               <a:rPr kumimoji="1" lang="ja-JP" altLang="en-US" sz="2400" dirty="0"/>
-              <a:t>に「</a:t>
+              <a:t>にある「</a:t>
             </a:r>
             <a:r>
               <a:rPr kumimoji="1" lang="en-US" altLang="ja-JP" sz="2400" b="1" dirty="0" err="1">
